--- a/lectures/week-04/lecture-zh.pptx
+++ b/lectures/week-04/lecture-zh.pptx
@@ -15298,7 +15298,7 @@
                 </a:solidFill>
                 <a:latin typeface="Source Han Sans SC"/>
               </a:rPr>
-              <a:t>理论约 90 min · Lab 约 75 min · 小测与小结 15 min</a:t>
+              <a:t>理论约 90 min · Lab 80 min · 小测与小结 10 min</a:t>
             </a:r>
           </a:p>
         </p:txBody>
@@ -18547,7 +18547,7 @@
                 </a:solidFill>
                 <a:latin typeface="Source Han Sans SC"/>
               </a:rPr>
-              <a:t>75 分钟：用一个 nn.Module 搭出 MLP，做两组对照实验（有/无激活、不同宽度与深度），把结果写成一张表。
+              <a:t>80 分钟：用一个 nn.Module 搭出 MLP，做两组对照实验（有/无激活、不同宽度与深度），把结果写成一张表。
 这也是模块一的收官：问题定义单 + 数据管道 + 模型，三件事今天要凑齐。</a:t>
             </a:r>
           </a:p>
